--- a/assets/pptx/catalog-679.pptx
+++ b/assets/pptx/catalog-679.pptx
@@ -3339,7 +3339,7 @@
                 <a:ea typeface="Ebrima"/>
                 <a:cs typeface="Ebrima"/>
               </a:rPr>
-              <a:t>ነይ ልጄ (3x) እያለ</a:t>
+              <a:t>ነይ ልጄ 3x እያለ</a:t>
             </a:r>
           </a:p>
           <a:p>
@@ -3460,7 +3460,7 @@
                 <a:ea typeface="Ebrima"/>
                 <a:cs typeface="Ebrima"/>
               </a:rPr>
-              <a:t>ሥራው ሥራው እንከን የሌለው (2x)</a:t>
+              <a:t>ሥራው ሥራው እንከን የሌለው 2x</a:t>
             </a:r>
           </a:p>
         </p:txBody>
@@ -3617,7 +3617,7 @@
                 <a:ea typeface="Ebrima"/>
                 <a:cs typeface="Ebrima"/>
               </a:rPr>
-              <a:t>ነይ ልጄ (3x) እያለ</a:t>
+              <a:t>ነይ ልጄ 3x እያለ</a:t>
             </a:r>
           </a:p>
           <a:p>
@@ -3841,7 +3841,7 @@
                 <a:ea typeface="Ebrima"/>
                 <a:cs typeface="Ebrima"/>
               </a:rPr>
-              <a:t>መራኝ እርሱ መራኝ እጄን ይዞ (4x)</a:t>
+              <a:t>መራኝ እርሱ መራኝ እጄን ይዞ 4x</a:t>
             </a:r>
           </a:p>
         </p:txBody>
@@ -3998,7 +3998,7 @@
                 <a:ea typeface="Ebrima"/>
                 <a:cs typeface="Ebrima"/>
               </a:rPr>
-              <a:t>ነይ ልጄ (3x) እያለ</a:t>
+              <a:t>ነይ ልጄ 3x እያለ</a:t>
             </a:r>
           </a:p>
           <a:p>
@@ -4137,7 +4137,7 @@
                 <a:ea typeface="Ebrima"/>
                 <a:cs typeface="Ebrima"/>
               </a:rPr>
-              <a:t>ያኖረኛል በድል . (1) . ከፊቴ</a:t>
+              <a:t>ያኖረኛል በድል . 1 . ከፊቴ</a:t>
             </a:r>
           </a:p>
         </p:txBody>
@@ -4222,7 +4222,7 @@
                 <a:ea typeface="Ebrima"/>
                 <a:cs typeface="Ebrima"/>
               </a:rPr>
-              <a:t>መራኝ እርሱ መራኝ እጄን ይዞ (4x)</a:t>
+              <a:t>መራኝ እርሱ መራኝ እጄን ይዞ 4x</a:t>
             </a:r>
           </a:p>
         </p:txBody>
@@ -4325,7 +4325,7 @@
                 <a:ea typeface="Ebrima"/>
                 <a:cs typeface="Ebrima"/>
               </a:rPr>
-              <a:t>ሥራው ሥራው እንከን የሌለው (2x)</a:t>
+              <a:t>ሥራው ሥራው እንከን የሌለው 2x</a:t>
             </a:r>
           </a:p>
         </p:txBody>
